--- a/HBookWeb/wwwroot/exports/ExportHotelDetails.pptx
+++ b/HBookWeb/wwwroot/exports/ExportHotelDetails.pptx
@@ -254,7 +254,7 @@
           <a:p>
             <a:fld id="{0B656A9B-1D5C-4773-96DA-59FFF9A0C685}" type="datetimeFigureOut">
               <a:rPr lang="en-US" dirty="0"/>
-              <a:t>6/14/2026</a:t>
+              <a:t>6/20/2026</a:t>
             </a:fld>
             <a:endParaRPr lang="en-US" dirty="0"/>
           </a:p>
@@ -441,7 +441,7 @@
           <a:p>
             <a:fld id="{0B656A9B-1D5C-4773-96DA-59FFF9A0C685}" type="datetimeFigureOut">
               <a:rPr lang="en-US" dirty="0"/>
-              <a:t>6/14/2026</a:t>
+              <a:t>6/20/2026</a:t>
             </a:fld>
             <a:endParaRPr lang="en-US" dirty="0"/>
           </a:p>
@@ -636,7 +636,7 @@
           <a:p>
             <a:fld id="{0B656A9B-1D5C-4773-96DA-59FFF9A0C685}" type="datetimeFigureOut">
               <a:rPr lang="en-US" dirty="0"/>
-              <a:t>6/14/2026</a:t>
+              <a:t>6/20/2026</a:t>
             </a:fld>
             <a:endParaRPr lang="en-US" dirty="0"/>
           </a:p>
@@ -823,7 +823,7 @@
           <a:p>
             <a:fld id="{0B656A9B-1D5C-4773-96DA-59FFF9A0C685}" type="datetimeFigureOut">
               <a:rPr lang="en-US" dirty="0"/>
-              <a:t>6/14/2026</a:t>
+              <a:t>6/20/2026</a:t>
             </a:fld>
             <a:endParaRPr lang="en-US" dirty="0"/>
           </a:p>
@@ -1085,7 +1085,7 @@
           <a:p>
             <a:fld id="{0B656A9B-1D5C-4773-96DA-59FFF9A0C685}" type="datetimeFigureOut">
               <a:rPr lang="en-US" dirty="0"/>
-              <a:t>6/14/2026</a:t>
+              <a:t>6/20/2026</a:t>
             </a:fld>
             <a:endParaRPr lang="en-US" dirty="0"/>
           </a:p>
@@ -1335,7 +1335,7 @@
           <a:p>
             <a:fld id="{0B656A9B-1D5C-4773-96DA-59FFF9A0C685}" type="datetimeFigureOut">
               <a:rPr lang="en-US" dirty="0"/>
-              <a:t>6/14/2026</a:t>
+              <a:t>6/20/2026</a:t>
             </a:fld>
             <a:endParaRPr lang="en-US" dirty="0"/>
           </a:p>
@@ -1725,7 +1725,7 @@
           <a:p>
             <a:fld id="{0B656A9B-1D5C-4773-96DA-59FFF9A0C685}" type="datetimeFigureOut">
               <a:rPr lang="en-US" dirty="0"/>
-              <a:t>6/14/2026</a:t>
+              <a:t>6/20/2026</a:t>
             </a:fld>
             <a:endParaRPr lang="en-US" dirty="0"/>
           </a:p>
@@ -1857,7 +1857,7 @@
           <a:p>
             <a:fld id="{0B656A9B-1D5C-4773-96DA-59FFF9A0C685}" type="datetimeFigureOut">
               <a:rPr lang="en-US" dirty="0"/>
-              <a:t>6/14/2026</a:t>
+              <a:t>6/20/2026</a:t>
             </a:fld>
             <a:endParaRPr lang="en-US" dirty="0"/>
           </a:p>
@@ -1962,7 +1962,7 @@
           <a:p>
             <a:fld id="{0B656A9B-1D5C-4773-96DA-59FFF9A0C685}" type="datetimeFigureOut">
               <a:rPr lang="en-US" dirty="0"/>
-              <a:t>6/14/2026</a:t>
+              <a:t>6/20/2026</a:t>
             </a:fld>
             <a:endParaRPr lang="en-US" dirty="0"/>
           </a:p>
@@ -2257,7 +2257,7 @@
           <a:p>
             <a:fld id="{0B656A9B-1D5C-4773-96DA-59FFF9A0C685}" type="datetimeFigureOut">
               <a:rPr lang="en-US" dirty="0"/>
-              <a:t>6/14/2026</a:t>
+              <a:t>6/20/2026</a:t>
             </a:fld>
             <a:endParaRPr lang="en-US" dirty="0"/>
           </a:p>
@@ -2530,7 +2530,7 @@
           <a:p>
             <a:fld id="{0B656A9B-1D5C-4773-96DA-59FFF9A0C685}" type="datetimeFigureOut">
               <a:rPr lang="en-US" dirty="0"/>
-              <a:t>6/14/2026</a:t>
+              <a:t>6/20/2026</a:t>
             </a:fld>
             <a:endParaRPr lang="en-US" dirty="0"/>
           </a:p>
@@ -2760,7 +2760,7 @@
           <a:p>
             <a:fld id="{0B656A9B-1D5C-4773-96DA-59FFF9A0C685}" type="datetimeFigureOut">
               <a:rPr lang="en-US" dirty="0"/>
-              <a:t>6/14/2026</a:t>
+              <a:t>6/20/2026</a:t>
             </a:fld>
             <a:endParaRPr lang="en-US" dirty="0"/>
           </a:p>
@@ -3458,8 +3458,21 @@
                   <a:schemeClr val="accent2"/>
                 </a:solidFill>
               </a:rPr>
-              <a:t>Luxury Pool Villa</a:t>
-            </a:r>
+              <a:t>Luxury </a:t>
+            </a:r>
+            <a:r>
+              <a:rPr lang="en-US" sz="2800" dirty="0" smtClean="0">
+                <a:solidFill>
+                  <a:schemeClr val="accent2"/>
+                </a:solidFill>
+              </a:rPr>
+              <a:t>Pool Hotel</a:t>
+            </a:r>
+            <a:endParaRPr lang="en-US" sz="2800" dirty="0">
+              <a:solidFill>
+                <a:schemeClr val="accent2"/>
+              </a:solidFill>
+            </a:endParaRPr>
           </a:p>
         </p:txBody>
       </p:sp>
@@ -3524,13 +3537,26 @@
           <a:p>
             <a:pPr algn="ctr" defTabSz="914400"/>
             <a:r>
-              <a:rPr lang="en-US" sz="3200" dirty="0">
+              <a:rPr lang="en-US" sz="3200" dirty="0" err="1" smtClean="0">
                 <a:solidFill>
                   <a:srgbClr val="00B050"/>
                 </a:solidFill>
               </a:rPr>
-              <a:t>WHITE LAGOON RESORT</a:t>
-            </a:r>
+              <a:t>Hbooking</a:t>
+            </a:r>
+            <a:r>
+              <a:rPr lang="en-US" sz="3200" dirty="0" smtClean="0">
+                <a:solidFill>
+                  <a:srgbClr val="00B050"/>
+                </a:solidFill>
+              </a:rPr>
+              <a:t> Hotel</a:t>
+            </a:r>
+            <a:endParaRPr lang="en-US" sz="3200" dirty="0">
+              <a:solidFill>
+                <a:srgbClr val="00B050"/>
+              </a:solidFill>
+            </a:endParaRPr>
           </a:p>
         </p:txBody>
       </p:sp>
@@ -3563,14 +3589,14 @@
           <a:lstStyle/>
           <a:p>
             <a:r>
-              <a:rPr lang="en-US" b="0" i="0" dirty="0">
+              <a:rPr lang="en-US" b="0" i="0" smtClean="0">
                 <a:solidFill>
                   <a:schemeClr val="bg1"/>
                 </a:solidFill>
                 <a:effectLst/>
                 <a:latin typeface="system-ui"/>
               </a:rPr>
-              <a:t>Villa Amenities</a:t>
+              <a:t>Hotel Amenities</a:t>
             </a:r>
             <a:endParaRPr lang="en-IN" dirty="0"/>
           </a:p>
